--- a/static/portfolio/kangmin-kim-portfolio-ko.pptx
+++ b/static/portfolio/kangmin-kim-portfolio-ko.pptx
@@ -3367,7 +3367,7 @@
         <p:spPr>
           <a:xfrm>
             <a:off x="822960" y="5074920"/>
-            <a:ext cx="1191463" cy="310896"/>
+            <a:ext cx="1228039" cy="310896"/>
           </a:xfrm>
           <a:prstGeom prst="roundRect">
             <a:avLst>
@@ -3422,8 +3422,8 @@
         </p:nvSpPr>
         <p:spPr>
           <a:xfrm>
-            <a:off x="2142439" y="5074920"/>
-            <a:ext cx="1191463" cy="310896"/>
+            <a:off x="2179015" y="5074920"/>
+            <a:ext cx="1228039" cy="310896"/>
           </a:xfrm>
           <a:prstGeom prst="roundRect">
             <a:avLst>
@@ -3478,8 +3478,8 @@
         </p:nvSpPr>
         <p:spPr>
           <a:xfrm>
-            <a:off x="3461918" y="5074920"/>
-            <a:ext cx="851306" cy="310896"/>
+            <a:off x="3535070" y="5074920"/>
+            <a:ext cx="887882" cy="310896"/>
           </a:xfrm>
           <a:prstGeom prst="roundRect">
             <a:avLst>
@@ -3534,8 +3534,8 @@
         </p:nvSpPr>
         <p:spPr>
           <a:xfrm>
-            <a:off x="4441240" y="5074920"/>
-            <a:ext cx="1021384" cy="310896"/>
+            <a:off x="4550968" y="5074920"/>
+            <a:ext cx="1057960" cy="310896"/>
           </a:xfrm>
           <a:prstGeom prst="roundRect">
             <a:avLst>
@@ -3590,8 +3590,8 @@
         </p:nvSpPr>
         <p:spPr>
           <a:xfrm>
-            <a:off x="5590640" y="5074920"/>
-            <a:ext cx="1701698" cy="310896"/>
+            <a:off x="5736944" y="5074920"/>
+            <a:ext cx="1738274" cy="310896"/>
           </a:xfrm>
           <a:prstGeom prst="roundRect">
             <a:avLst>
@@ -3646,8 +3646,8 @@
         </p:nvSpPr>
         <p:spPr>
           <a:xfrm>
-            <a:off x="7420354" y="5074920"/>
-            <a:ext cx="766267" cy="310896"/>
+            <a:off x="7603234" y="5074920"/>
+            <a:ext cx="802843" cy="310896"/>
           </a:xfrm>
           <a:prstGeom prst="roundRect">
             <a:avLst>
@@ -4423,7 +4423,7 @@
         <p:spPr>
           <a:xfrm>
             <a:off x="1600200" y="5888736"/>
-            <a:ext cx="341071" cy="310896"/>
+            <a:ext cx="377647" cy="310896"/>
           </a:xfrm>
           <a:prstGeom prst="roundRect">
             <a:avLst>
@@ -4478,8 +4478,8 @@
         </p:nvSpPr>
         <p:spPr>
           <a:xfrm>
-            <a:off x="2050999" y="5888736"/>
-            <a:ext cx="511149" cy="310896"/>
+            <a:off x="2087575" y="5888736"/>
+            <a:ext cx="547725" cy="310896"/>
           </a:xfrm>
           <a:prstGeom prst="roundRect">
             <a:avLst>
@@ -4534,8 +4534,8 @@
         </p:nvSpPr>
         <p:spPr>
           <a:xfrm>
-            <a:off x="2671876" y="5888736"/>
-            <a:ext cx="766267" cy="310896"/>
+            <a:off x="2745028" y="5888736"/>
+            <a:ext cx="802843" cy="310896"/>
           </a:xfrm>
           <a:prstGeom prst="roundRect">
             <a:avLst>
@@ -4590,8 +4590,8 @@
         </p:nvSpPr>
         <p:spPr>
           <a:xfrm>
-            <a:off x="3547871" y="5888736"/>
-            <a:ext cx="1021384" cy="310896"/>
+            <a:off x="3657599" y="5888736"/>
+            <a:ext cx="1057960" cy="310896"/>
           </a:xfrm>
           <a:prstGeom prst="roundRect">
             <a:avLst>
@@ -4646,8 +4646,8 @@
         </p:nvSpPr>
         <p:spPr>
           <a:xfrm>
-            <a:off x="4678983" y="5888736"/>
-            <a:ext cx="766267" cy="310896"/>
+            <a:off x="4825287" y="5888736"/>
+            <a:ext cx="802843" cy="310896"/>
           </a:xfrm>
           <a:prstGeom prst="roundRect">
             <a:avLst>
@@ -4702,8 +4702,8 @@
         </p:nvSpPr>
         <p:spPr>
           <a:xfrm>
-            <a:off x="5554978" y="5888736"/>
-            <a:ext cx="1106424" cy="310896"/>
+            <a:off x="5737858" y="5888736"/>
+            <a:ext cx="1143000" cy="310896"/>
           </a:xfrm>
           <a:prstGeom prst="roundRect">
             <a:avLst>
@@ -4758,8 +4758,8 @@
         </p:nvSpPr>
         <p:spPr>
           <a:xfrm>
-            <a:off x="6771130" y="5888736"/>
-            <a:ext cx="766267" cy="310896"/>
+            <a:off x="6990586" y="5888736"/>
+            <a:ext cx="802843" cy="310896"/>
           </a:xfrm>
           <a:prstGeom prst="roundRect">
             <a:avLst>
@@ -4814,8 +4814,8 @@
         </p:nvSpPr>
         <p:spPr>
           <a:xfrm>
-            <a:off x="7647125" y="5888736"/>
-            <a:ext cx="851306" cy="310896"/>
+            <a:off x="7903157" y="5888736"/>
+            <a:ext cx="887882" cy="310896"/>
           </a:xfrm>
           <a:prstGeom prst="roundRect">
             <a:avLst>
@@ -4870,8 +4870,8 @@
         </p:nvSpPr>
         <p:spPr>
           <a:xfrm>
-            <a:off x="8608159" y="5888736"/>
-            <a:ext cx="1021384" cy="310896"/>
+            <a:off x="8900767" y="5888736"/>
+            <a:ext cx="1057960" cy="310896"/>
           </a:xfrm>
           <a:prstGeom prst="roundRect">
             <a:avLst>
@@ -6916,7 +6916,7 @@
         <p:spPr>
           <a:xfrm>
             <a:off x="1600200" y="5888736"/>
-            <a:ext cx="1276502" cy="310896"/>
+            <a:ext cx="1313078" cy="310896"/>
           </a:xfrm>
           <a:prstGeom prst="roundRect">
             <a:avLst>
@@ -6971,8 +6971,8 @@
         </p:nvSpPr>
         <p:spPr>
           <a:xfrm>
-            <a:off x="2986430" y="5888736"/>
-            <a:ext cx="851306" cy="310896"/>
+            <a:off x="3023006" y="5888736"/>
+            <a:ext cx="887882" cy="310896"/>
           </a:xfrm>
           <a:prstGeom prst="roundRect">
             <a:avLst>
@@ -7027,8 +7027,8 @@
         </p:nvSpPr>
         <p:spPr>
           <a:xfrm>
-            <a:off x="3947464" y="5888736"/>
-            <a:ext cx="1021384" cy="310896"/>
+            <a:off x="4020616" y="5888736"/>
+            <a:ext cx="1057960" cy="310896"/>
           </a:xfrm>
           <a:prstGeom prst="roundRect">
             <a:avLst>
@@ -7083,8 +7083,8 @@
         </p:nvSpPr>
         <p:spPr>
           <a:xfrm>
-            <a:off x="5078576" y="5888736"/>
-            <a:ext cx="766267" cy="310896"/>
+            <a:off x="5188304" y="5888736"/>
+            <a:ext cx="802843" cy="310896"/>
           </a:xfrm>
           <a:prstGeom prst="roundRect">
             <a:avLst>
@@ -7139,8 +7139,8 @@
         </p:nvSpPr>
         <p:spPr>
           <a:xfrm>
-            <a:off x="5954571" y="5888736"/>
-            <a:ext cx="766267" cy="310896"/>
+            <a:off x="6100875" y="5888736"/>
+            <a:ext cx="802843" cy="310896"/>
           </a:xfrm>
           <a:prstGeom prst="roundRect">
             <a:avLst>
@@ -7195,8 +7195,8 @@
         </p:nvSpPr>
         <p:spPr>
           <a:xfrm>
-            <a:off x="6830566" y="5888736"/>
-            <a:ext cx="851306" cy="310896"/>
+            <a:off x="7013446" y="5888736"/>
+            <a:ext cx="887882" cy="310896"/>
           </a:xfrm>
           <a:prstGeom prst="roundRect">
             <a:avLst>
@@ -7251,8 +7251,8 @@
         </p:nvSpPr>
         <p:spPr>
           <a:xfrm>
-            <a:off x="7791600" y="5888736"/>
-            <a:ext cx="851306" cy="310896"/>
+            <a:off x="8011056" y="5888736"/>
+            <a:ext cx="887882" cy="310896"/>
           </a:xfrm>
           <a:prstGeom prst="roundRect">
             <a:avLst>
@@ -7307,8 +7307,8 @@
         </p:nvSpPr>
         <p:spPr>
           <a:xfrm>
-            <a:off x="8752634" y="5888736"/>
-            <a:ext cx="1361541" cy="310896"/>
+            <a:off x="9008666" y="5888736"/>
+            <a:ext cx="1398117" cy="310896"/>
           </a:xfrm>
           <a:prstGeom prst="roundRect">
             <a:avLst>
@@ -9217,7 +9217,7 @@
         <p:spPr>
           <a:xfrm>
             <a:off x="1600200" y="5888736"/>
-            <a:ext cx="851306" cy="310896"/>
+            <a:ext cx="887882" cy="310896"/>
           </a:xfrm>
           <a:prstGeom prst="roundRect">
             <a:avLst>
@@ -9272,8 +9272,8 @@
         </p:nvSpPr>
         <p:spPr>
           <a:xfrm>
-            <a:off x="2561234" y="5888736"/>
-            <a:ext cx="1531620" cy="310896"/>
+            <a:off x="2597810" y="5888736"/>
+            <a:ext cx="1568196" cy="310896"/>
           </a:xfrm>
           <a:prstGeom prst="roundRect">
             <a:avLst>
@@ -9328,8 +9328,8 @@
         </p:nvSpPr>
         <p:spPr>
           <a:xfrm>
-            <a:off x="4202582" y="5888736"/>
-            <a:ext cx="1361541" cy="310896"/>
+            <a:off x="4275734" y="5888736"/>
+            <a:ext cx="1398117" cy="310896"/>
           </a:xfrm>
           <a:prstGeom prst="roundRect">
             <a:avLst>
@@ -9384,8 +9384,8 @@
         </p:nvSpPr>
         <p:spPr>
           <a:xfrm>
-            <a:off x="5673851" y="5888736"/>
-            <a:ext cx="1446580" cy="310896"/>
+            <a:off x="5783579" y="5888736"/>
+            <a:ext cx="1483156" cy="310896"/>
           </a:xfrm>
           <a:prstGeom prst="roundRect">
             <a:avLst>
@@ -9440,8 +9440,8 @@
         </p:nvSpPr>
         <p:spPr>
           <a:xfrm>
-            <a:off x="7230159" y="5888736"/>
-            <a:ext cx="1106424" cy="310896"/>
+            <a:off x="7376463" y="5888736"/>
+            <a:ext cx="1143000" cy="310896"/>
           </a:xfrm>
           <a:prstGeom prst="roundRect">
             <a:avLst>
@@ -9496,8 +9496,8 @@
         </p:nvSpPr>
         <p:spPr>
           <a:xfrm>
-            <a:off x="8446311" y="5888736"/>
-            <a:ext cx="1361541" cy="310896"/>
+            <a:off x="8629191" y="5888736"/>
+            <a:ext cx="1398117" cy="310896"/>
           </a:xfrm>
           <a:prstGeom prst="roundRect">
             <a:avLst>
@@ -9552,8 +9552,8 @@
         </p:nvSpPr>
         <p:spPr>
           <a:xfrm>
-            <a:off x="9917580" y="5888736"/>
-            <a:ext cx="766267" cy="310896"/>
+            <a:off x="10137036" y="5888736"/>
+            <a:ext cx="802843" cy="310896"/>
           </a:xfrm>
           <a:prstGeom prst="roundRect">
             <a:avLst>
@@ -9608,8 +9608,8 @@
         </p:nvSpPr>
         <p:spPr>
           <a:xfrm>
-            <a:off x="10793575" y="5888736"/>
-            <a:ext cx="851306" cy="310896"/>
+            <a:off x="1600200" y="6309360"/>
+            <a:ext cx="887882" cy="310896"/>
           </a:xfrm>
           <a:prstGeom prst="roundRect">
             <a:avLst>
@@ -9664,8 +9664,8 @@
         </p:nvSpPr>
         <p:spPr>
           <a:xfrm>
-            <a:off x="1600200" y="6309360"/>
-            <a:ext cx="1021384" cy="310896"/>
+            <a:off x="2597810" y="6309360"/>
+            <a:ext cx="1057960" cy="310896"/>
           </a:xfrm>
           <a:prstGeom prst="roundRect">
             <a:avLst>
@@ -9720,8 +9720,8 @@
         </p:nvSpPr>
         <p:spPr>
           <a:xfrm>
-            <a:off x="2731312" y="6309360"/>
-            <a:ext cx="1446580" cy="310896"/>
+            <a:off x="3765498" y="6309360"/>
+            <a:ext cx="1483156" cy="310896"/>
           </a:xfrm>
           <a:prstGeom prst="roundRect">
             <a:avLst>
@@ -12158,7 +12158,7 @@
         </p:nvSpPr>
         <p:spPr>
           <a:xfrm>
-            <a:off x="777240" y="1463040"/>
+            <a:off x="777240" y="1371600"/>
             <a:ext cx="1828800" cy="320040"/>
           </a:xfrm>
           <a:prstGeom prst="rect">
@@ -12194,8 +12194,8 @@
         </p:nvSpPr>
         <p:spPr>
           <a:xfrm>
-            <a:off x="2423160" y="1417320"/>
-            <a:ext cx="2126894" cy="310896"/>
+            <a:off x="2423160" y="1325880"/>
+            <a:ext cx="2163470" cy="310896"/>
           </a:xfrm>
           <a:prstGeom prst="roundRect">
             <a:avLst>
@@ -12250,8 +12250,8 @@
         </p:nvSpPr>
         <p:spPr>
           <a:xfrm>
-            <a:off x="4659782" y="1417320"/>
-            <a:ext cx="1871776" cy="310896"/>
+            <a:off x="4696358" y="1325880"/>
+            <a:ext cx="1908352" cy="310896"/>
           </a:xfrm>
           <a:prstGeom prst="roundRect">
             <a:avLst>
@@ -12306,8 +12306,8 @@
         </p:nvSpPr>
         <p:spPr>
           <a:xfrm>
-            <a:off x="6641286" y="1417320"/>
-            <a:ext cx="1786737" cy="310896"/>
+            <a:off x="6714438" y="1325880"/>
+            <a:ext cx="1823313" cy="310896"/>
           </a:xfrm>
           <a:prstGeom prst="roundRect">
             <a:avLst>
@@ -12362,8 +12362,8 @@
         </p:nvSpPr>
         <p:spPr>
           <a:xfrm>
-            <a:off x="8537751" y="1417320"/>
-            <a:ext cx="1276502" cy="310896"/>
+            <a:off x="8647479" y="1325880"/>
+            <a:ext cx="1313078" cy="310896"/>
           </a:xfrm>
           <a:prstGeom prst="roundRect">
             <a:avLst>
@@ -12418,8 +12418,8 @@
         </p:nvSpPr>
         <p:spPr>
           <a:xfrm>
-            <a:off x="2423160" y="1837944"/>
-            <a:ext cx="1956815" cy="310896"/>
+            <a:off x="2423160" y="1746504"/>
+            <a:ext cx="1993391" cy="310896"/>
           </a:xfrm>
           <a:prstGeom prst="roundRect">
             <a:avLst>
@@ -12474,8 +12474,8 @@
         </p:nvSpPr>
         <p:spPr>
           <a:xfrm>
-            <a:off x="4489703" y="1837944"/>
-            <a:ext cx="1956815" cy="310896"/>
+            <a:off x="4526279" y="1746504"/>
+            <a:ext cx="1993391" cy="310896"/>
           </a:xfrm>
           <a:prstGeom prst="roundRect">
             <a:avLst>
@@ -12530,8 +12530,8 @@
         </p:nvSpPr>
         <p:spPr>
           <a:xfrm>
-            <a:off x="6556246" y="1837944"/>
-            <a:ext cx="1531620" cy="310896"/>
+            <a:off x="6629398" y="1746504"/>
+            <a:ext cx="1568196" cy="310896"/>
           </a:xfrm>
           <a:prstGeom prst="roundRect">
             <a:avLst>
@@ -12586,8 +12586,8 @@
         </p:nvSpPr>
         <p:spPr>
           <a:xfrm>
-            <a:off x="8197594" y="1837944"/>
-            <a:ext cx="1276502" cy="310896"/>
+            <a:off x="8307322" y="1746504"/>
+            <a:ext cx="1313078" cy="310896"/>
           </a:xfrm>
           <a:prstGeom prst="roundRect">
             <a:avLst>
@@ -12642,8 +12642,8 @@
         </p:nvSpPr>
         <p:spPr>
           <a:xfrm>
-            <a:off x="9583824" y="1837944"/>
-            <a:ext cx="851306" cy="310896"/>
+            <a:off x="9730128" y="1746504"/>
+            <a:ext cx="887882" cy="310896"/>
           </a:xfrm>
           <a:prstGeom prst="roundRect">
             <a:avLst>
@@ -12698,8 +12698,8 @@
         </p:nvSpPr>
         <p:spPr>
           <a:xfrm>
-            <a:off x="2423160" y="2258568"/>
-            <a:ext cx="1446580" cy="310896"/>
+            <a:off x="2423160" y="2167128"/>
+            <a:ext cx="1483156" cy="310896"/>
           </a:xfrm>
           <a:prstGeom prst="roundRect">
             <a:avLst>
@@ -12754,8 +12754,8 @@
         </p:nvSpPr>
         <p:spPr>
           <a:xfrm>
-            <a:off x="3979468" y="2258568"/>
-            <a:ext cx="2041855" cy="310896"/>
+            <a:off x="4016044" y="2167128"/>
+            <a:ext cx="2078431" cy="310896"/>
           </a:xfrm>
           <a:prstGeom prst="roundRect">
             <a:avLst>
@@ -12810,7 +12810,7 @@
         </p:nvSpPr>
         <p:spPr>
           <a:xfrm>
-            <a:off x="777240" y="2542032"/>
+            <a:off x="777240" y="2624328"/>
             <a:ext cx="1828800" cy="320040"/>
           </a:xfrm>
           <a:prstGeom prst="rect">
@@ -12846,8 +12846,8 @@
         </p:nvSpPr>
         <p:spPr>
           <a:xfrm>
-            <a:off x="2423160" y="2496312"/>
-            <a:ext cx="1021384" cy="310896"/>
+            <a:off x="2423160" y="2578608"/>
+            <a:ext cx="1057960" cy="310896"/>
           </a:xfrm>
           <a:prstGeom prst="roundRect">
             <a:avLst>
@@ -12902,8 +12902,8 @@
         </p:nvSpPr>
         <p:spPr>
           <a:xfrm>
-            <a:off x="3554272" y="2496312"/>
-            <a:ext cx="766267" cy="310896"/>
+            <a:off x="3590848" y="2578608"/>
+            <a:ext cx="802843" cy="310896"/>
           </a:xfrm>
           <a:prstGeom prst="roundRect">
             <a:avLst>
@@ -12958,8 +12958,8 @@
         </p:nvSpPr>
         <p:spPr>
           <a:xfrm>
-            <a:off x="4430267" y="2496312"/>
-            <a:ext cx="596188" cy="310896"/>
+            <a:off x="4503419" y="2578608"/>
+            <a:ext cx="632764" cy="310896"/>
           </a:xfrm>
           <a:prstGeom prst="roundRect">
             <a:avLst>
@@ -13014,8 +13014,8 @@
         </p:nvSpPr>
         <p:spPr>
           <a:xfrm>
-            <a:off x="5136183" y="2496312"/>
-            <a:ext cx="766267" cy="310896"/>
+            <a:off x="5245911" y="2578608"/>
+            <a:ext cx="802843" cy="310896"/>
           </a:xfrm>
           <a:prstGeom prst="roundRect">
             <a:avLst>
@@ -13070,8 +13070,8 @@
         </p:nvSpPr>
         <p:spPr>
           <a:xfrm>
-            <a:off x="6012178" y="2496312"/>
-            <a:ext cx="936345" cy="310896"/>
+            <a:off x="6158482" y="2578608"/>
+            <a:ext cx="972921" cy="310896"/>
           </a:xfrm>
           <a:prstGeom prst="roundRect">
             <a:avLst>
@@ -13126,8 +13126,8 @@
         </p:nvSpPr>
         <p:spPr>
           <a:xfrm>
-            <a:off x="7058251" y="2496312"/>
-            <a:ext cx="766267" cy="310896"/>
+            <a:off x="7241131" y="2578608"/>
+            <a:ext cx="802843" cy="310896"/>
           </a:xfrm>
           <a:prstGeom prst="roundRect">
             <a:avLst>
@@ -13182,8 +13182,8 @@
         </p:nvSpPr>
         <p:spPr>
           <a:xfrm>
-            <a:off x="7934246" y="2496312"/>
-            <a:ext cx="851306" cy="310896"/>
+            <a:off x="8153702" y="2578608"/>
+            <a:ext cx="887882" cy="310896"/>
           </a:xfrm>
           <a:prstGeom prst="roundRect">
             <a:avLst>
@@ -13238,8 +13238,8 @@
         </p:nvSpPr>
         <p:spPr>
           <a:xfrm>
-            <a:off x="8895280" y="2496312"/>
-            <a:ext cx="1276502" cy="310896"/>
+            <a:off x="9151312" y="2578608"/>
+            <a:ext cx="1313078" cy="310896"/>
           </a:xfrm>
           <a:prstGeom prst="roundRect">
             <a:avLst>
@@ -13294,8 +13294,8 @@
         </p:nvSpPr>
         <p:spPr>
           <a:xfrm>
-            <a:off x="10281510" y="2496312"/>
-            <a:ext cx="1021384" cy="310896"/>
+            <a:off x="2423160" y="2999232"/>
+            <a:ext cx="1057960" cy="310896"/>
           </a:xfrm>
           <a:prstGeom prst="roundRect">
             <a:avLst>
@@ -13350,8 +13350,8 @@
         </p:nvSpPr>
         <p:spPr>
           <a:xfrm>
-            <a:off x="2423160" y="2916936"/>
-            <a:ext cx="851306" cy="310896"/>
+            <a:off x="3590848" y="2999232"/>
+            <a:ext cx="887882" cy="310896"/>
           </a:xfrm>
           <a:prstGeom prst="roundRect">
             <a:avLst>
@@ -13406,8 +13406,8 @@
         </p:nvSpPr>
         <p:spPr>
           <a:xfrm>
-            <a:off x="3384194" y="2916936"/>
-            <a:ext cx="851306" cy="310896"/>
+            <a:off x="4588458" y="2999232"/>
+            <a:ext cx="887882" cy="310896"/>
           </a:xfrm>
           <a:prstGeom prst="roundRect">
             <a:avLst>
@@ -13462,7 +13462,7 @@
         </p:nvSpPr>
         <p:spPr>
           <a:xfrm>
-            <a:off x="777240" y="3621024"/>
+            <a:off x="777240" y="3456432"/>
             <a:ext cx="1828800" cy="320040"/>
           </a:xfrm>
           <a:prstGeom prst="rect">
@@ -13498,8 +13498,8 @@
         </p:nvSpPr>
         <p:spPr>
           <a:xfrm>
-            <a:off x="2423160" y="3575304"/>
-            <a:ext cx="1531620" cy="310896"/>
+            <a:off x="2423160" y="3410712"/>
+            <a:ext cx="1568196" cy="310896"/>
           </a:xfrm>
           <a:prstGeom prst="roundRect">
             <a:avLst>
@@ -13554,8 +13554,8 @@
         </p:nvSpPr>
         <p:spPr>
           <a:xfrm>
-            <a:off x="4064508" y="3575304"/>
-            <a:ext cx="1786737" cy="310896"/>
+            <a:off x="4101084" y="3410712"/>
+            <a:ext cx="1823313" cy="310896"/>
           </a:xfrm>
           <a:prstGeom prst="roundRect">
             <a:avLst>
@@ -13610,8 +13610,8 @@
         </p:nvSpPr>
         <p:spPr>
           <a:xfrm>
-            <a:off x="5960973" y="3575304"/>
-            <a:ext cx="426110" cy="310896"/>
+            <a:off x="6034125" y="3410712"/>
+            <a:ext cx="462686" cy="310896"/>
           </a:xfrm>
           <a:prstGeom prst="roundRect">
             <a:avLst>
@@ -13666,8 +13666,8 @@
         </p:nvSpPr>
         <p:spPr>
           <a:xfrm>
-            <a:off x="6496811" y="3575304"/>
-            <a:ext cx="1361541" cy="310896"/>
+            <a:off x="6606539" y="3410712"/>
+            <a:ext cx="1398117" cy="310896"/>
           </a:xfrm>
           <a:prstGeom prst="roundRect">
             <a:avLst>
@@ -13722,8 +13722,8 @@
         </p:nvSpPr>
         <p:spPr>
           <a:xfrm>
-            <a:off x="7968080" y="3575304"/>
-            <a:ext cx="1276502" cy="310896"/>
+            <a:off x="8114384" y="3410712"/>
+            <a:ext cx="1313078" cy="310896"/>
           </a:xfrm>
           <a:prstGeom prst="roundRect">
             <a:avLst>
@@ -13778,8 +13778,8 @@
         </p:nvSpPr>
         <p:spPr>
           <a:xfrm>
-            <a:off x="9354310" y="3575304"/>
-            <a:ext cx="1531620" cy="310896"/>
+            <a:off x="9537190" y="3410712"/>
+            <a:ext cx="1568196" cy="310896"/>
           </a:xfrm>
           <a:prstGeom prst="roundRect">
             <a:avLst>
@@ -13834,8 +13834,8 @@
         </p:nvSpPr>
         <p:spPr>
           <a:xfrm>
-            <a:off x="2423160" y="3995928"/>
-            <a:ext cx="851306" cy="310896"/>
+            <a:off x="2423160" y="3831336"/>
+            <a:ext cx="887882" cy="310896"/>
           </a:xfrm>
           <a:prstGeom prst="roundRect">
             <a:avLst>
@@ -13890,8 +13890,8 @@
         </p:nvSpPr>
         <p:spPr>
           <a:xfrm>
-            <a:off x="3384194" y="3995928"/>
-            <a:ext cx="1191463" cy="310896"/>
+            <a:off x="3420770" y="3831336"/>
+            <a:ext cx="1228039" cy="310896"/>
           </a:xfrm>
           <a:prstGeom prst="roundRect">
             <a:avLst>
@@ -13946,8 +13946,8 @@
         </p:nvSpPr>
         <p:spPr>
           <a:xfrm>
-            <a:off x="4685385" y="3995928"/>
-            <a:ext cx="681228" cy="310896"/>
+            <a:off x="4758537" y="3831336"/>
+            <a:ext cx="717803" cy="310896"/>
           </a:xfrm>
           <a:prstGeom prst="roundRect">
             <a:avLst>
@@ -14002,7 +14002,7 @@
         </p:nvSpPr>
         <p:spPr>
           <a:xfrm>
-            <a:off x="777240" y="4700016"/>
+            <a:off x="777240" y="4288536"/>
             <a:ext cx="1828800" cy="320040"/>
           </a:xfrm>
           <a:prstGeom prst="rect">
@@ -14038,8 +14038,8 @@
         </p:nvSpPr>
         <p:spPr>
           <a:xfrm>
-            <a:off x="2423160" y="4654296"/>
-            <a:ext cx="1361541" cy="310896"/>
+            <a:off x="2423160" y="4242816"/>
+            <a:ext cx="1398117" cy="310896"/>
           </a:xfrm>
           <a:prstGeom prst="roundRect">
             <a:avLst>
@@ -14094,8 +14094,8 @@
         </p:nvSpPr>
         <p:spPr>
           <a:xfrm>
-            <a:off x="3894429" y="4654296"/>
-            <a:ext cx="1106424" cy="310896"/>
+            <a:off x="3931005" y="4242816"/>
+            <a:ext cx="1143000" cy="310896"/>
           </a:xfrm>
           <a:prstGeom prst="roundRect">
             <a:avLst>
@@ -14150,8 +14150,8 @@
         </p:nvSpPr>
         <p:spPr>
           <a:xfrm>
-            <a:off x="5110581" y="4654296"/>
-            <a:ext cx="1106424" cy="310896"/>
+            <a:off x="5183733" y="4242816"/>
+            <a:ext cx="1143000" cy="310896"/>
           </a:xfrm>
           <a:prstGeom prst="roundRect">
             <a:avLst>
@@ -14206,8 +14206,8 @@
         </p:nvSpPr>
         <p:spPr>
           <a:xfrm>
-            <a:off x="6326733" y="4654296"/>
-            <a:ext cx="1106424" cy="310896"/>
+            <a:off x="6436461" y="4242816"/>
+            <a:ext cx="1143000" cy="310896"/>
           </a:xfrm>
           <a:prstGeom prst="roundRect">
             <a:avLst>
@@ -14262,8 +14262,8 @@
         </p:nvSpPr>
         <p:spPr>
           <a:xfrm>
-            <a:off x="7542885" y="4654296"/>
-            <a:ext cx="681228" cy="310896"/>
+            <a:off x="7689189" y="4242816"/>
+            <a:ext cx="717803" cy="310896"/>
           </a:xfrm>
           <a:prstGeom prst="roundRect">
             <a:avLst>
@@ -14318,8 +14318,8 @@
         </p:nvSpPr>
         <p:spPr>
           <a:xfrm>
-            <a:off x="8333841" y="4654296"/>
-            <a:ext cx="1446580" cy="310896"/>
+            <a:off x="8516720" y="4242816"/>
+            <a:ext cx="1483156" cy="310896"/>
           </a:xfrm>
           <a:prstGeom prst="roundRect">
             <a:avLst>
@@ -14374,8 +14374,8 @@
         </p:nvSpPr>
         <p:spPr>
           <a:xfrm>
-            <a:off x="9890149" y="4654296"/>
-            <a:ext cx="851306" cy="310896"/>
+            <a:off x="10109604" y="4242816"/>
+            <a:ext cx="887882" cy="310896"/>
           </a:xfrm>
           <a:prstGeom prst="roundRect">
             <a:avLst>
@@ -14430,8 +14430,8 @@
         </p:nvSpPr>
         <p:spPr>
           <a:xfrm>
-            <a:off x="2423160" y="5074920"/>
-            <a:ext cx="681228" cy="310896"/>
+            <a:off x="2423160" y="4663440"/>
+            <a:ext cx="717803" cy="310896"/>
           </a:xfrm>
           <a:prstGeom prst="roundRect">
             <a:avLst>
@@ -14486,8 +14486,8 @@
         </p:nvSpPr>
         <p:spPr>
           <a:xfrm>
-            <a:off x="3214116" y="5074920"/>
-            <a:ext cx="766267" cy="310896"/>
+            <a:off x="3250691" y="4663440"/>
+            <a:ext cx="802843" cy="310896"/>
           </a:xfrm>
           <a:prstGeom prst="roundRect">
             <a:avLst>
@@ -14542,8 +14542,8 @@
         </p:nvSpPr>
         <p:spPr>
           <a:xfrm>
-            <a:off x="4090111" y="5074920"/>
-            <a:ext cx="1021384" cy="310896"/>
+            <a:off x="4163262" y="4663440"/>
+            <a:ext cx="1057960" cy="310896"/>
           </a:xfrm>
           <a:prstGeom prst="roundRect">
             <a:avLst>
@@ -14598,8 +14598,8 @@
         </p:nvSpPr>
         <p:spPr>
           <a:xfrm>
-            <a:off x="5221223" y="5074920"/>
-            <a:ext cx="1446580" cy="310896"/>
+            <a:off x="5330950" y="4663440"/>
+            <a:ext cx="1483156" cy="310896"/>
           </a:xfrm>
           <a:prstGeom prst="roundRect">
             <a:avLst>
@@ -14654,8 +14654,8 @@
         </p:nvSpPr>
         <p:spPr>
           <a:xfrm>
-            <a:off x="777240" y="5029200"/>
-            <a:ext cx="10835640" cy="1371600"/>
+            <a:off x="777240" y="5157216"/>
+            <a:ext cx="10332720" cy="960120"/>
           </a:xfrm>
           <a:prstGeom prst="roundRect">
             <a:avLst>
@@ -14700,8 +14700,8 @@
         </p:nvSpPr>
         <p:spPr>
           <a:xfrm>
-            <a:off x="1005840" y="5257800"/>
-            <a:ext cx="2468880" cy="914400"/>
+            <a:off x="960120" y="5294376"/>
+            <a:ext cx="2395728" cy="777240"/>
           </a:xfrm>
           <a:prstGeom prst="rect">
             <a:avLst/>
@@ -14749,8 +14749,8 @@
         </p:nvSpPr>
         <p:spPr>
           <a:xfrm>
-            <a:off x="3675887" y="5257800"/>
-            <a:ext cx="2468880" cy="914400"/>
+            <a:off x="3502152" y="5294376"/>
+            <a:ext cx="2395728" cy="777240"/>
           </a:xfrm>
           <a:prstGeom prst="rect">
             <a:avLst/>
@@ -14798,8 +14798,8 @@
         </p:nvSpPr>
         <p:spPr>
           <a:xfrm>
-            <a:off x="6345936" y="5257800"/>
-            <a:ext cx="2468880" cy="914400"/>
+            <a:off x="6044183" y="5294376"/>
+            <a:ext cx="2395728" cy="777240"/>
           </a:xfrm>
           <a:prstGeom prst="rect">
             <a:avLst/>
@@ -14847,8 +14847,8 @@
         </p:nvSpPr>
         <p:spPr>
           <a:xfrm>
-            <a:off x="9015984" y="5257800"/>
-            <a:ext cx="2468880" cy="914400"/>
+            <a:off x="8586216" y="5294376"/>
+            <a:ext cx="2395728" cy="777240"/>
           </a:xfrm>
           <a:prstGeom prst="rect">
             <a:avLst/>
@@ -15065,7 +15065,7 @@
         <p:spPr>
           <a:xfrm>
             <a:off x="822960" y="4343400"/>
-            <a:ext cx="10789920" cy="1097280"/>
+            <a:ext cx="10789920" cy="1645920"/>
           </a:xfrm>
           <a:prstGeom prst="rect">
             <a:avLst/>
@@ -15100,7 +15100,20 @@
                 <a:latin typeface="Pretendard"/>
                 <a:ea typeface="Pretendard"/>
               </a:rPr>
-              <a:t>Email    kmkim26@outlook.com</a:t>
+              <a:t>공개 저장소   github.com/adorahelen/siem-trinity-public · /ai-console-public</a:t>
+            </a:r>
+          </a:p>
+          <a:p>
+            <a:pPr algn="l"/>
+            <a:r>
+              <a:rPr sz="1400" b="0">
+                <a:solidFill>
+                  <a:srgbClr val="C9D6EE"/>
+                </a:solidFill>
+                <a:latin typeface="Pretendard"/>
+                <a:ea typeface="Pretendard"/>
+              </a:rPr>
+              <a:t>Email    adorahelenmin@naver.com</a:t>
             </a:r>
           </a:p>
         </p:txBody>
@@ -15136,7 +15149,7 @@
                 <a:latin typeface="Pretendard"/>
                 <a:ea typeface="Pretendard"/>
               </a:rPr>
-              <a:t>이 덱의 저장소는 대부분 private입니다 — 열람이 필요하면 요청 시 초대하거나 공개판(siem-trinity-public)을 안내드립니다.</a:t>
+              <a:t>위 2건은 로그인 없이 바로 열람 가능합니다 — 나머지 저장소는 private이라 요청 시 초대해 드립니다.</a:t>
             </a:r>
           </a:p>
         </p:txBody>
@@ -18020,7 +18033,7 @@
                 <a:latin typeface="Pretendard"/>
                 <a:ea typeface="Pretendard"/>
               </a:rPr>
-              <a:t>detection-api FastAPI 엔드포인트 27개가 Loki·Prometheus를 단일 BFF로 통합</a:t>
+              <a:t>detection-api FastAPI 엔드포인트 28개가 Loki·Prometheus를 단일 BFF로 통합</a:t>
             </a:r>
           </a:p>
           <a:p>
@@ -18097,7 +18110,7 @@
         <p:spPr>
           <a:xfrm>
             <a:off x="1600200" y="5888736"/>
-            <a:ext cx="1191463" cy="310896"/>
+            <a:ext cx="1228039" cy="310896"/>
           </a:xfrm>
           <a:prstGeom prst="roundRect">
             <a:avLst>
@@ -18152,8 +18165,8 @@
         </p:nvSpPr>
         <p:spPr>
           <a:xfrm>
-            <a:off x="2901391" y="5888736"/>
-            <a:ext cx="851306" cy="310896"/>
+            <a:off x="2937967" y="5888736"/>
+            <a:ext cx="887882" cy="310896"/>
           </a:xfrm>
           <a:prstGeom prst="roundRect">
             <a:avLst>
@@ -18208,8 +18221,8 @@
         </p:nvSpPr>
         <p:spPr>
           <a:xfrm>
-            <a:off x="3862425" y="5888736"/>
-            <a:ext cx="596188" cy="310896"/>
+            <a:off x="3935577" y="5888736"/>
+            <a:ext cx="632764" cy="310896"/>
           </a:xfrm>
           <a:prstGeom prst="roundRect">
             <a:avLst>
@@ -18264,8 +18277,8 @@
         </p:nvSpPr>
         <p:spPr>
           <a:xfrm>
-            <a:off x="4568341" y="5888736"/>
-            <a:ext cx="1106424" cy="310896"/>
+            <a:off x="4678069" y="5888736"/>
+            <a:ext cx="1143000" cy="310896"/>
           </a:xfrm>
           <a:prstGeom prst="roundRect">
             <a:avLst>
@@ -18320,8 +18333,8 @@
         </p:nvSpPr>
         <p:spPr>
           <a:xfrm>
-            <a:off x="5784493" y="5888736"/>
-            <a:ext cx="681228" cy="310896"/>
+            <a:off x="5930797" y="5888736"/>
+            <a:ext cx="717803" cy="310896"/>
           </a:xfrm>
           <a:prstGeom prst="roundRect">
             <a:avLst>
@@ -18376,8 +18389,8 @@
         </p:nvSpPr>
         <p:spPr>
           <a:xfrm>
-            <a:off x="6575449" y="5888736"/>
-            <a:ext cx="936345" cy="310896"/>
+            <a:off x="6758328" y="5888736"/>
+            <a:ext cx="972921" cy="310896"/>
           </a:xfrm>
           <a:prstGeom prst="roundRect">
             <a:avLst>
@@ -18432,8 +18445,8 @@
         </p:nvSpPr>
         <p:spPr>
           <a:xfrm>
-            <a:off x="7621522" y="5888736"/>
-            <a:ext cx="596188" cy="310896"/>
+            <a:off x="7840977" y="5888736"/>
+            <a:ext cx="632764" cy="310896"/>
           </a:xfrm>
           <a:prstGeom prst="roundRect">
             <a:avLst>
@@ -18488,8 +18501,8 @@
         </p:nvSpPr>
         <p:spPr>
           <a:xfrm>
-            <a:off x="8327438" y="5888736"/>
-            <a:ext cx="1276502" cy="310896"/>
+            <a:off x="8583469" y="5888736"/>
+            <a:ext cx="1313078" cy="310896"/>
           </a:xfrm>
           <a:prstGeom prst="roundRect">
             <a:avLst>
@@ -18544,8 +18557,8 @@
         </p:nvSpPr>
         <p:spPr>
           <a:xfrm>
-            <a:off x="9713668" y="5888736"/>
-            <a:ext cx="766267" cy="310896"/>
+            <a:off x="10006275" y="5888736"/>
+            <a:ext cx="802843" cy="310896"/>
           </a:xfrm>
           <a:prstGeom prst="roundRect">
             <a:avLst>
@@ -18600,8 +18613,8 @@
         </p:nvSpPr>
         <p:spPr>
           <a:xfrm>
-            <a:off x="10589663" y="5888736"/>
-            <a:ext cx="936345" cy="310896"/>
+            <a:off x="1600200" y="6309360"/>
+            <a:ext cx="972921" cy="310896"/>
           </a:xfrm>
           <a:prstGeom prst="roundRect">
             <a:avLst>
@@ -18656,8 +18669,8 @@
         </p:nvSpPr>
         <p:spPr>
           <a:xfrm>
-            <a:off x="1600200" y="6309360"/>
-            <a:ext cx="936345" cy="310896"/>
+            <a:off x="2682849" y="6309360"/>
+            <a:ext cx="972921" cy="310896"/>
           </a:xfrm>
           <a:prstGeom prst="roundRect">
             <a:avLst>
@@ -18712,8 +18725,8 @@
         </p:nvSpPr>
         <p:spPr>
           <a:xfrm>
-            <a:off x="2646273" y="6309360"/>
-            <a:ext cx="1446580" cy="310896"/>
+            <a:off x="3765498" y="6309360"/>
+            <a:ext cx="1483156" cy="310896"/>
           </a:xfrm>
           <a:prstGeom prst="roundRect">
             <a:avLst>
@@ -19254,7 +19267,7 @@
                 <a:latin typeface="Pretendard"/>
                 <a:ea typeface="Pretendard"/>
               </a:rPr>
-              <a:t>FastAPI BFF · 27 엔드포인트
+              <a:t>FastAPI BFF · 28 엔드포인트
 ML 탐지기 4종</a:t>
             </a:r>
           </a:p>
@@ -19456,7 +19469,7 @@
                 <a:latin typeface="Pretendard"/>
                 <a:ea typeface="Pretendard"/>
               </a:rPr>
-              <a:t>자동 대응 체인 6단계  (코드 ✅ · 운영 토글 OFF = dry-run)</a:t>
+              <a:t>자동 대응 체인 6단계  (코드 6/6 · 운영 토글 OFF = dry-run)</a:t>
             </a:r>
           </a:p>
           <a:p>
@@ -20476,7 +20489,7 @@
         <p:spPr>
           <a:xfrm>
             <a:off x="1600200" y="5888736"/>
-            <a:ext cx="1871776" cy="310896"/>
+            <a:ext cx="1908352" cy="310896"/>
           </a:xfrm>
           <a:prstGeom prst="roundRect">
             <a:avLst>
@@ -20531,8 +20544,8 @@
         </p:nvSpPr>
         <p:spPr>
           <a:xfrm>
-            <a:off x="3581704" y="5888736"/>
-            <a:ext cx="851306" cy="310896"/>
+            <a:off x="3618280" y="5888736"/>
+            <a:ext cx="887882" cy="310896"/>
           </a:xfrm>
           <a:prstGeom prst="roundRect">
             <a:avLst>
@@ -20587,8 +20600,8 @@
         </p:nvSpPr>
         <p:spPr>
           <a:xfrm>
-            <a:off x="4542738" y="5888736"/>
-            <a:ext cx="1276502" cy="310896"/>
+            <a:off x="4615890" y="5888736"/>
+            <a:ext cx="1313078" cy="310896"/>
           </a:xfrm>
           <a:prstGeom prst="roundRect">
             <a:avLst>
@@ -20643,8 +20656,8 @@
         </p:nvSpPr>
         <p:spPr>
           <a:xfrm>
-            <a:off x="5928968" y="5888736"/>
-            <a:ext cx="1021384" cy="310896"/>
+            <a:off x="6038696" y="5888736"/>
+            <a:ext cx="1057960" cy="310896"/>
           </a:xfrm>
           <a:prstGeom prst="roundRect">
             <a:avLst>
@@ -20699,8 +20712,8 @@
         </p:nvSpPr>
         <p:spPr>
           <a:xfrm>
-            <a:off x="7060080" y="5888736"/>
-            <a:ext cx="1276502" cy="310896"/>
+            <a:off x="7206384" y="5888736"/>
+            <a:ext cx="1313078" cy="310896"/>
           </a:xfrm>
           <a:prstGeom prst="roundRect">
             <a:avLst>
@@ -20755,8 +20768,8 @@
         </p:nvSpPr>
         <p:spPr>
           <a:xfrm>
-            <a:off x="8446310" y="5888736"/>
-            <a:ext cx="681228" cy="310896"/>
+            <a:off x="8629190" y="5888736"/>
+            <a:ext cx="717803" cy="310896"/>
           </a:xfrm>
           <a:prstGeom prst="roundRect">
             <a:avLst>
@@ -20811,8 +20824,8 @@
         </p:nvSpPr>
         <p:spPr>
           <a:xfrm>
-            <a:off x="9237266" y="5888736"/>
-            <a:ext cx="766267" cy="310896"/>
+            <a:off x="9456721" y="5888736"/>
+            <a:ext cx="802843" cy="310896"/>
           </a:xfrm>
           <a:prstGeom prst="roundRect">
             <a:avLst>
@@ -23242,7 +23255,7 @@
         <p:spPr>
           <a:xfrm>
             <a:off x="1600200" y="5888736"/>
-            <a:ext cx="681228" cy="310896"/>
+            <a:ext cx="717803" cy="310896"/>
           </a:xfrm>
           <a:prstGeom prst="roundRect">
             <a:avLst>
@@ -23297,8 +23310,8 @@
         </p:nvSpPr>
         <p:spPr>
           <a:xfrm>
-            <a:off x="2391156" y="5888736"/>
-            <a:ext cx="1021384" cy="310896"/>
+            <a:off x="2427731" y="5888736"/>
+            <a:ext cx="1057960" cy="310896"/>
           </a:xfrm>
           <a:prstGeom prst="roundRect">
             <a:avLst>
@@ -23353,8 +23366,8 @@
         </p:nvSpPr>
         <p:spPr>
           <a:xfrm>
-            <a:off x="3522268" y="5888736"/>
-            <a:ext cx="511149" cy="310896"/>
+            <a:off x="3595419" y="5888736"/>
+            <a:ext cx="547725" cy="310896"/>
           </a:xfrm>
           <a:prstGeom prst="roundRect">
             <a:avLst>
@@ -23409,8 +23422,8 @@
         </p:nvSpPr>
         <p:spPr>
           <a:xfrm>
-            <a:off x="4143145" y="5888736"/>
-            <a:ext cx="1276502" cy="310896"/>
+            <a:off x="4252872" y="5888736"/>
+            <a:ext cx="1313078" cy="310896"/>
           </a:xfrm>
           <a:prstGeom prst="roundRect">
             <a:avLst>
@@ -23465,8 +23478,8 @@
         </p:nvSpPr>
         <p:spPr>
           <a:xfrm>
-            <a:off x="5529375" y="5888736"/>
-            <a:ext cx="1191463" cy="310896"/>
+            <a:off x="5675678" y="5888736"/>
+            <a:ext cx="1228039" cy="310896"/>
           </a:xfrm>
           <a:prstGeom prst="roundRect">
             <a:avLst>
@@ -23521,8 +23534,8 @@
         </p:nvSpPr>
         <p:spPr>
           <a:xfrm>
-            <a:off x="6830566" y="5888736"/>
-            <a:ext cx="1446580" cy="310896"/>
+            <a:off x="7013445" y="5888736"/>
+            <a:ext cx="1483156" cy="310896"/>
           </a:xfrm>
           <a:prstGeom prst="roundRect">
             <a:avLst>
@@ -23577,8 +23590,8 @@
         </p:nvSpPr>
         <p:spPr>
           <a:xfrm>
-            <a:off x="8386874" y="5888736"/>
-            <a:ext cx="681228" cy="310896"/>
+            <a:off x="8606329" y="5888736"/>
+            <a:ext cx="717803" cy="310896"/>
           </a:xfrm>
           <a:prstGeom prst="roundRect">
             <a:avLst>
@@ -23633,8 +23646,8 @@
         </p:nvSpPr>
         <p:spPr>
           <a:xfrm>
-            <a:off x="9177830" y="5888736"/>
-            <a:ext cx="1616659" cy="310896"/>
+            <a:off x="9433860" y="5888736"/>
+            <a:ext cx="1653235" cy="310896"/>
           </a:xfrm>
           <a:prstGeom prst="roundRect">
             <a:avLst>
